--- a/decks/mirror-mirror-lesson-v2.pptx
+++ b/decks/mirror-mirror-lesson-v2.pptx
@@ -6001,6 +6001,45 @@
                 <a:latin typeface="Inter Tight"/>
               </a:rPr>
               <a:t>Beaver Upper School · Counseling</a:t>
+            </a:r>
+          </a:p>
+        </p:txBody>
+      </p:sp>
+      <p:sp>
+        <p:nvSpPr>
+          <p:cNvPr id="8" name="TextBox 7"/>
+          <p:cNvSpPr txBox="1"/>
+          <p:nvPr/>
+        </p:nvSpPr>
+        <p:spPr>
+          <a:xfrm>
+            <a:off x="6766560" y="5897880"/>
+            <a:ext cx="4846320" cy="640080"/>
+          </a:xfrm>
+          <a:prstGeom prst="rect">
+            <a:avLst/>
+          </a:prstGeom>
+          <a:noFill/>
+        </p:spPr>
+        <p:txBody>
+          <a:bodyPr wrap="square" anchor="t" lIns="0" rIns="0" tIns="0" bIns="0">
+            <a:spAutoFit/>
+          </a:bodyPr>
+          <a:lstStyle/>
+          <a:p>
+            <a:pPr algn="r">
+              <a:spcAft>
+                <a:spcPts val="495"/>
+              </a:spcAft>
+            </a:pPr>
+            <a:r>
+              <a:rPr sz="1100" b="0" i="0">
+                <a:solidFill>
+                  <a:srgbClr val="E8E4DA"/>
+                </a:solidFill>
+                <a:latin typeface="Inter Tight"/>
+              </a:rPr>
+              <a:t>Written by Dr. Rick Wilson, with AI-assisted drafting. Every lesson is reviewed and edited by Dr. Wilson.</a:t>
             </a:r>
           </a:p>
         </p:txBody>
